--- a/Group Project /SLCM_Part1_Presentation.pptx
+++ b/Group Project /SLCM_Part1_Presentation.pptx
@@ -1115,7 +1115,7 @@
           <a:p>
             <a:fld id="{C171DC17-4A50-5F49-AEC7-C955C81B92E5}" type="datetimeFigureOut">
               <a:rPr lang="en-US" smtClean="0"/>
-              <a:t>9/30/26</a:t>
+              <a:t>10/6/26</a:t>
             </a:fld>
             <a:endParaRPr lang="en-US"/>
           </a:p>
@@ -1377,7 +1377,7 @@
           <a:p>
             <a:fld id="{C171DC17-4A50-5F49-AEC7-C955C81B92E5}" type="datetimeFigureOut">
               <a:rPr lang="en-US" smtClean="0"/>
-              <a:t>9/30/26</a:t>
+              <a:t>10/6/26</a:t>
             </a:fld>
             <a:endParaRPr lang="en-US"/>
           </a:p>
@@ -1575,7 +1575,7 @@
           <a:p>
             <a:fld id="{C171DC17-4A50-5F49-AEC7-C955C81B92E5}" type="datetimeFigureOut">
               <a:rPr lang="en-US" smtClean="0"/>
-              <a:t>9/30/26</a:t>
+              <a:t>10/6/26</a:t>
             </a:fld>
             <a:endParaRPr lang="en-US"/>
           </a:p>
@@ -1783,7 +1783,7 @@
           <a:p>
             <a:fld id="{C171DC17-4A50-5F49-AEC7-C955C81B92E5}" type="datetimeFigureOut">
               <a:rPr lang="en-US" smtClean="0"/>
-              <a:t>9/30/26</a:t>
+              <a:t>10/6/26</a:t>
             </a:fld>
             <a:endParaRPr lang="en-US"/>
           </a:p>
@@ -2027,7 +2027,7 @@
           <a:p>
             <a:fld id="{C171DC17-4A50-5F49-AEC7-C955C81B92E5}" type="datetimeFigureOut">
               <a:rPr lang="en-US" smtClean="0"/>
-              <a:t>9/30/26</a:t>
+              <a:t>10/6/26</a:t>
             </a:fld>
             <a:endParaRPr lang="en-US"/>
           </a:p>
@@ -2225,7 +2225,7 @@
           <a:p>
             <a:fld id="{C171DC17-4A50-5F49-AEC7-C955C81B92E5}" type="datetimeFigureOut">
               <a:rPr lang="en-US" smtClean="0"/>
-              <a:t>9/30/26</a:t>
+              <a:t>10/6/26</a:t>
             </a:fld>
             <a:endParaRPr lang="en-US"/>
           </a:p>
@@ -2507,7 +2507,7 @@
           <a:p>
             <a:fld id="{C171DC17-4A50-5F49-AEC7-C955C81B92E5}" type="datetimeFigureOut">
               <a:rPr lang="en-US" smtClean="0"/>
-              <a:t>9/30/26</a:t>
+              <a:t>10/6/26</a:t>
             </a:fld>
             <a:endParaRPr lang="en-US"/>
           </a:p>
@@ -2772,7 +2772,7 @@
           <a:p>
             <a:fld id="{C171DC17-4A50-5F49-AEC7-C955C81B92E5}" type="datetimeFigureOut">
               <a:rPr lang="en-US" smtClean="0"/>
-              <a:t>9/30/26</a:t>
+              <a:t>10/6/26</a:t>
             </a:fld>
             <a:endParaRPr lang="en-US"/>
           </a:p>
@@ -3184,7 +3184,7 @@
           <a:p>
             <a:fld id="{C171DC17-4A50-5F49-AEC7-C955C81B92E5}" type="datetimeFigureOut">
               <a:rPr lang="en-US" smtClean="0"/>
-              <a:t>9/30/26</a:t>
+              <a:t>10/6/26</a:t>
             </a:fld>
             <a:endParaRPr lang="en-US"/>
           </a:p>
@@ -3325,7 +3325,7 @@
           <a:p>
             <a:fld id="{C171DC17-4A50-5F49-AEC7-C955C81B92E5}" type="datetimeFigureOut">
               <a:rPr lang="en-US" smtClean="0"/>
-              <a:t>9/30/26</a:t>
+              <a:t>10/6/26</a:t>
             </a:fld>
             <a:endParaRPr lang="en-US"/>
           </a:p>
@@ -3438,7 +3438,7 @@
           <a:p>
             <a:fld id="{C171DC17-4A50-5F49-AEC7-C955C81B92E5}" type="datetimeFigureOut">
               <a:rPr lang="en-US" smtClean="0"/>
-              <a:t>9/30/26</a:t>
+              <a:t>10/6/26</a:t>
             </a:fld>
             <a:endParaRPr lang="en-US"/>
           </a:p>
@@ -3749,7 +3749,7 @@
           <a:p>
             <a:fld id="{C171DC17-4A50-5F49-AEC7-C955C81B92E5}" type="datetimeFigureOut">
               <a:rPr lang="en-US" smtClean="0"/>
-              <a:t>9/30/26</a:t>
+              <a:t>10/6/26</a:t>
             </a:fld>
             <a:endParaRPr lang="en-US"/>
           </a:p>
@@ -4040,7 +4040,7 @@
             <a:fld id="{C171DC17-4A50-5F49-AEC7-C955C81B92E5}" type="datetimeFigureOut">
               <a:rPr lang="en-US" smtClean="0"/>
               <a:pPr/>
-              <a:t>9/30/26</a:t>
+              <a:t>10/6/26</a:t>
             </a:fld>
             <a:endParaRPr lang="en-US" dirty="0"/>
           </a:p>
@@ -5625,8 +5625,13 @@
             </a:pPr>
             <a:r>
               <a:rPr dirty="0"/>
-              <a:t>Needed: 19</a:t>
-            </a:r>
+              <a:t>Needed: </a:t>
+            </a:r>
+            <a:r>
+              <a:rPr lang="en-US" dirty="0"/>
+              <a:t>21</a:t>
+            </a:r>
+            <a:endParaRPr dirty="0"/>
           </a:p>
           <a:p>
             <a:pPr marL="285750" indent="-285750" algn="l">
@@ -5699,6 +5704,40 @@
               <a:rPr dirty="0"/>
               <a:t>ZIP, household counts</a:t>
             </a:r>
+            <a:endParaRPr lang="en-US" dirty="0"/>
+          </a:p>
+          <a:p>
+            <a:pPr marL="285750" indent="-285750">
+              <a:spcAft>
+                <a:spcPts val="600"/>
+              </a:spcAft>
+              <a:buFont typeface="Arial" panose="020B0604020202020204" pitchFamily="34" charset="0"/>
+              <a:buChar char="•"/>
+              <a:defRPr sz="1600">
+                <a:solidFill>
+                  <a:srgbClr val="262626"/>
+                </a:solidFill>
+              </a:defRPr>
+            </a:pPr>
+            <a:r>
+              <a:rPr lang="en-US" dirty="0"/>
+              <a:t>Monthly rent, past-due rent</a:t>
+            </a:r>
+          </a:p>
+          <a:p>
+            <a:pPr marL="285750" indent="-285750" algn="l">
+              <a:spcAft>
+                <a:spcPts val="600"/>
+              </a:spcAft>
+              <a:buFont typeface="Arial" panose="020B0604020202020204" pitchFamily="34" charset="0"/>
+              <a:buChar char="•"/>
+              <a:defRPr sz="1600">
+                <a:solidFill>
+                  <a:srgbClr val="262626"/>
+                </a:solidFill>
+              </a:defRPr>
+            </a:pPr>
+            <a:endParaRPr dirty="0"/>
           </a:p>
         </p:txBody>
       </p:sp>
@@ -5906,24 +5945,6 @@
             <a:r>
               <a:rPr dirty="0"/>
               <a:t>Gender, race/ethnicity</a:t>
-            </a:r>
-          </a:p>
-          <a:p>
-            <a:pPr marL="285750" indent="-285750" algn="l">
-              <a:spcAft>
-                <a:spcPts val="600"/>
-              </a:spcAft>
-              <a:buFont typeface="Arial" panose="020B0604020202020204" pitchFamily="34" charset="0"/>
-              <a:buChar char="•"/>
-              <a:defRPr sz="1600">
-                <a:solidFill>
-                  <a:srgbClr val="262626"/>
-                </a:solidFill>
-              </a:defRPr>
-            </a:pPr>
-            <a:r>
-              <a:rPr dirty="0"/>
-              <a:t>Monthly rent, past-due rent</a:t>
             </a:r>
           </a:p>
           <a:p>
@@ -7475,24 +7496,6 @@
               <a:t>Employment does not protect against hardship: nearly a third of employed households rely mainly on SNAP/TANF</a:t>
             </a:r>
           </a:p>
-          <a:p>
-            <a:pPr marL="285750" indent="-285750" algn="l">
-              <a:spcAft>
-                <a:spcPts val="600"/>
-              </a:spcAft>
-              <a:buFont typeface="Arial" panose="020B0604020202020204" pitchFamily="34" charset="0"/>
-              <a:buChar char="•"/>
-              <a:defRPr sz="1700">
-                <a:solidFill>
-                  <a:srgbClr val="262626"/>
-                </a:solidFill>
-              </a:defRPr>
-            </a:pPr>
-            <a:r>
-              <a:rPr dirty="0"/>
-              <a:t>Only 27 people (6.8%) appear on more than one intake</a:t>
-            </a:r>
-          </a:p>
         </p:txBody>
       </p:sp>
       <p:sp>
@@ -7589,7 +7592,7 @@
             </a:r>
             <a:r>
               <a:rPr lang="en-US" dirty="0"/>
-              <a:t> isn’t as common as we thought</a:t>
+              <a:t> is fairly common</a:t>
             </a:r>
             <a:endParaRPr dirty="0"/>
           </a:p>
